--- a/teaching_ppt/Ch2_空天地一体化通信系统.pptx
+++ b/teaching_ppt/Ch2_空天地一体化通信系统.pptx
@@ -112,28 +112,28 @@
   <p:extLst>
     <p:ext uri="{521415D9-36F7-43E2-AB2F-B90AF26B5E84}">
       <p14:sectionLst xmlns:p14="http://schemas.microsoft.com/office/powerpoint/2010/main">
-        <p14:section name="封面与目录 Opening" id="{91a60766-8f7a-ecfd-e928-13a7e3993c1d}">
+        <p14:section name="封面与目录 Opening" id="{bb7fba4d-3a73-5c38-0386-3adb127951c8}">
           <p14:sldIdLst>
             <p14:sldId id="256"/>
             <p14:sldId id="257"/>
           </p14:sldIdLst>
         </p14:section>
-        <p14:section name="2.1 空天地信道特征" id="{3717a826-3230-fa39-5425-c6522a93094b}">
+        <p14:section name="2.1 空天地信道特征" id="{5c01ac49-023e-e88c-c67f-337df7bf7641}">
           <p14:sldIdLst>
             <p14:sldId id="258"/>
           </p14:sldIdLst>
         </p14:section>
-        <p14:section name="2.2 空天地一体化通信关键技术" id="{bd0a49bd-01ce-88ad-bf29-8bd174d99e2d}">
+        <p14:section name="2.2 空天地一体化通信关键技术" id="{cfc35550-0084-10ac-0afc-34341d0a9aee}">
           <p14:sldIdLst>
             <p14:sldId id="259"/>
           </p14:sldIdLst>
         </p14:section>
-        <p14:section name="2.3 空天地一体化通信应用场景" id="{3aeab385-da4d-0ac1-ef20-1fb82624aa2a}">
+        <p14:section name="2.3 空天地一体化通信应用场景" id="{ee95d4a8-eb98-e200-1f31-856c16eb5a08}">
           <p14:sldIdLst>
             <p14:sldId id="260"/>
           </p14:sldIdLst>
         </p14:section>
-        <p14:section name="结束 Closing" id="{da6f0fa4-30b5-d8f5-66a3-c565c9bc6f3e}">
+        <p14:section name="结束 Closing" id="{6dbd8664-ec9e-ae0f-15df-6ffb8740ec1f}">
           <p14:sldIdLst>
             <p14:sldId id="261"/>
           </p14:sldIdLst>
